--- a/evidence/HLS Workforce - Fable 5.1 - Maximum - Workforce and Hiring Update - Leadership Briefing - Sep 2026.pptx
+++ b/evidence/HLS Workforce - Fable 5.1 - Maximum - Workforce and Hiring Update - Leadership Briefing - Sep 2026.pptx
@@ -136,6 +136,321 @@
 
 <file path=ppt/changesInfos/changesInfo1.xml><?xml version="1.0" encoding="utf-8"?>
 <pc:chgInfo xmlns:a="http://schemas.openxmlformats.org/drawingml/2006/main" xmlns:r="http://schemas.openxmlformats.org/officeDocument/2006/relationships" xmlns:ac="http://schemas.microsoft.com/office/drawing/2013/main/command" xmlns:pc="http://schemas.microsoft.com/office/powerpoint/2013/main/command">
+  <pc:docChgLst>
+    <pc:chgData clId="Web-{CCD5D920-994C-4664-82A6-A432AB54255C}"/>
+    <pc:docChg chg="modSld">
+      <pc:chgData name="" userId="" providerId="" clId="Web-{CCD5D920-994C-4664-82A6-A432AB54255C}" dt="2026-09-03T13:40:46.388" v="4" actId="34807"/>
+      <pc:docMkLst>
+        <pc:docMk/>
+      </pc:docMkLst>
+      <pc:sldChg chg="addSp delSp modSp">
+        <pc:chgData name="" userId="" providerId="" clId="Web-{CCD5D920-994C-4664-82A6-A432AB54255C}" dt="2026-09-03T13:37:13.460" v="1" actId="34807"/>
+        <pc:sldMkLst>
+          <pc:docMk/>
+          <pc:sldMk cId="620554265" sldId="458"/>
+        </pc:sldMkLst>
+        <pc:spChg chg="del">
+          <ac:chgData name="" userId="" providerId="" clId="Web-{CCD5D920-994C-4664-82A6-A432AB54255C}" dt="2026-09-03T13:37:13.460" v="1" actId="34807"/>
+          <ac:spMkLst>
+            <pc:docMk/>
+            <pc:sldMk cId="620554265" sldId="458"/>
+            <ac:spMk id="5" creationId="{2D20B5BF-C407-3550-9B52-71099F6E45F9}"/>
+          </ac:spMkLst>
+        </pc:spChg>
+        <pc:spChg chg="add mod">
+          <ac:chgData name="" userId="" providerId="" clId="Web-{CCD5D920-994C-4664-82A6-A432AB54255C}" dt="2026-09-03T13:37:13.460" v="1" actId="34807"/>
+          <ac:spMkLst>
+            <pc:docMk/>
+            <pc:sldMk cId="620554265" sldId="458"/>
+            <ac:spMk id="93" creationId="{7F7B456F-A856-A32F-74CD-9E0B8FEAC8C1}"/>
+          </ac:spMkLst>
+        </pc:spChg>
+      </pc:sldChg>
+      <pc:sldChg chg="addSp delSp modSp">
+        <pc:chgData name="" userId="" providerId="" clId="Web-{CCD5D920-994C-4664-82A6-A432AB54255C}" dt="2026-09-03T13:35:52.818" v="0" actId="34807"/>
+        <pc:sldMkLst>
+          <pc:docMk/>
+          <pc:sldMk cId="1734722321" sldId="660"/>
+        </pc:sldMkLst>
+        <pc:spChg chg="del">
+          <ac:chgData name="" userId="" providerId="" clId="Web-{CCD5D920-994C-4664-82A6-A432AB54255C}" dt="2026-09-03T13:35:52.818" v="0" actId="34807"/>
+          <ac:spMkLst>
+            <pc:docMk/>
+            <pc:sldMk cId="1734722321" sldId="660"/>
+            <ac:spMk id="16" creationId="{64E45013-10A8-BB52-7AD7-73DFCCE6D259}"/>
+          </ac:spMkLst>
+        </pc:spChg>
+        <pc:spChg chg="add mod">
+          <ac:chgData name="" userId="" providerId="" clId="Web-{CCD5D920-994C-4664-82A6-A432AB54255C}" dt="2026-09-03T13:35:52.818" v="0" actId="34807"/>
+          <ac:spMkLst>
+            <pc:docMk/>
+            <pc:sldMk cId="1734722321" sldId="660"/>
+            <ac:spMk id="90" creationId="{4A5A6A0F-FA9B-7D4E-C164-8A4A1C2324F1}"/>
+          </ac:spMkLst>
+        </pc:spChg>
+        <pc:spChg chg="add mod">
+          <ac:chgData name="" userId="" providerId="" clId="Web-{CCD5D920-994C-4664-82A6-A432AB54255C}" dt="2026-09-03T13:35:52.818" v="0" actId="34807"/>
+          <ac:spMkLst>
+            <pc:docMk/>
+            <pc:sldMk cId="1734722321" sldId="660"/>
+            <ac:spMk id="91" creationId="{962EC4BF-5C3A-3FDE-E761-3401BE09A1D7}"/>
+          </ac:spMkLst>
+        </pc:spChg>
+      </pc:sldChg>
+      <pc:sldChg chg="addSp delSp modSp">
+        <pc:chgData name="" userId="" providerId="" clId="Web-{CCD5D920-994C-4664-82A6-A432AB54255C}" dt="2026-09-03T13:38:12.430" v="3" actId="34807"/>
+        <pc:sldMkLst>
+          <pc:docMk/>
+          <pc:sldMk cId="4070091250" sldId="863"/>
+        </pc:sldMkLst>
+        <pc:spChg chg="add mod">
+          <ac:chgData name="" userId="" providerId="" clId="Web-{CCD5D920-994C-4664-82A6-A432AB54255C}" dt="2026-09-03T13:37:32.179" v="2" actId="34807"/>
+          <ac:spMkLst>
+            <pc:docMk/>
+            <pc:sldMk cId="4070091250" sldId="863"/>
+            <ac:spMk id="128" creationId="{D2014E26-87E2-A853-C3DC-0819C6DC0BEE}"/>
+          </ac:spMkLst>
+        </pc:spChg>
+        <pc:graphicFrameChg chg="add mod">
+          <ac:chgData name="" userId="" providerId="" clId="Web-{CCD5D920-994C-4664-82A6-A432AB54255C}" dt="2026-09-03T13:38:12.430" v="3" actId="34807"/>
+          <ac:graphicFrameMkLst>
+            <pc:docMk/>
+            <pc:sldMk cId="4070091250" sldId="863"/>
+            <ac:graphicFrameMk id="3" creationId="{8195C725-3FFD-5D81-0F1E-A0882D4A175D}"/>
+          </ac:graphicFrameMkLst>
+        </pc:graphicFrameChg>
+        <pc:graphicFrameChg chg="del">
+          <ac:chgData name="" userId="" providerId="" clId="Web-{CCD5D920-994C-4664-82A6-A432AB54255C}" dt="2026-09-03T13:37:32.179" v="2" actId="34807"/>
+          <ac:graphicFrameMkLst>
+            <pc:docMk/>
+            <pc:sldMk cId="4070091250" sldId="863"/>
+            <ac:graphicFrameMk id="4" creationId="{3C81E9AE-D809-9B2A-98EA-172B81940050}"/>
+          </ac:graphicFrameMkLst>
+        </pc:graphicFrameChg>
+      </pc:sldChg>
+      <pc:sldChg chg="addSp delSp modSp">
+        <pc:chgData name="" userId="" providerId="" clId="Web-{CCD5D920-994C-4664-82A6-A432AB54255C}" dt="2026-09-03T13:37:13.460" v="1" actId="34807"/>
+        <pc:sldMkLst>
+          <pc:docMk/>
+          <pc:sldMk cId="2294594786" sldId="1067"/>
+        </pc:sldMkLst>
+        <pc:spChg chg="del">
+          <ac:chgData name="" userId="" providerId="" clId="Web-{CCD5D920-994C-4664-82A6-A432AB54255C}" dt="2026-09-03T13:37:13.460" v="1" actId="34807"/>
+          <ac:spMkLst>
+            <pc:docMk/>
+            <pc:sldMk cId="2294594786" sldId="1067"/>
+            <ac:spMk id="36" creationId="{5790311E-3373-517A-9762-7B0811EAB349}"/>
+          </ac:spMkLst>
+        </pc:spChg>
+        <pc:spChg chg="del">
+          <ac:chgData name="" userId="" providerId="" clId="Web-{CCD5D920-994C-4664-82A6-A432AB54255C}" dt="2026-09-03T13:37:13.460" v="1" actId="34807"/>
+          <ac:spMkLst>
+            <pc:docMk/>
+            <pc:sldMk cId="2294594786" sldId="1067"/>
+            <ac:spMk id="53" creationId="{3DD5F1D2-38B4-14E5-A7A9-6129F4ED85BF}"/>
+          </ac:spMkLst>
+        </pc:spChg>
+        <pc:spChg chg="add mod">
+          <ac:chgData name="" userId="" providerId="" clId="Web-{CCD5D920-994C-4664-82A6-A432AB54255C}" dt="2026-09-03T13:37:13.460" v="1" actId="34807"/>
+          <ac:spMkLst>
+            <pc:docMk/>
+            <pc:sldMk cId="2294594786" sldId="1067"/>
+            <ac:spMk id="96" creationId="{46F7271E-7199-5FA2-66EB-D7BBA057E2F4}"/>
+          </ac:spMkLst>
+        </pc:spChg>
+        <pc:spChg chg="add mod">
+          <ac:chgData name="" userId="" providerId="" clId="Web-{CCD5D920-994C-4664-82A6-A432AB54255C}" dt="2026-09-03T13:37:13.460" v="1" actId="34807"/>
+          <ac:spMkLst>
+            <pc:docMk/>
+            <pc:sldMk cId="2294594786" sldId="1067"/>
+            <ac:spMk id="97" creationId="{9AAFC44E-E5D0-70A9-A2AC-3CA93662FAC2}"/>
+          </ac:spMkLst>
+        </pc:spChg>
+        <pc:spChg chg="add mod">
+          <ac:chgData name="" userId="" providerId="" clId="Web-{CCD5D920-994C-4664-82A6-A432AB54255C}" dt="2026-09-03T13:37:13.460" v="1" actId="34807"/>
+          <ac:spMkLst>
+            <pc:docMk/>
+            <pc:sldMk cId="2294594786" sldId="1067"/>
+            <ac:spMk id="98" creationId="{34557469-54A4-F14C-BF87-C474EB3C0796}"/>
+          </ac:spMkLst>
+        </pc:spChg>
+        <pc:spChg chg="add mod">
+          <ac:chgData name="" userId="" providerId="" clId="Web-{CCD5D920-994C-4664-82A6-A432AB54255C}" dt="2026-09-03T13:37:13.460" v="1" actId="34807"/>
+          <ac:spMkLst>
+            <pc:docMk/>
+            <pc:sldMk cId="2294594786" sldId="1067"/>
+            <ac:spMk id="99" creationId="{B1E14D00-2D20-71B0-C3DF-5A0A3FC0F7AD}"/>
+          </ac:spMkLst>
+        </pc:spChg>
+      </pc:sldChg>
+      <pc:sldChg chg="addSp delSp modSp">
+        <pc:chgData name="" userId="" providerId="" clId="Web-{CCD5D920-994C-4664-82A6-A432AB54255C}" dt="2026-09-03T13:37:13.460" v="1" actId="34807"/>
+        <pc:sldMkLst>
+          <pc:docMk/>
+          <pc:sldMk cId="1477863308" sldId="1272"/>
+        </pc:sldMkLst>
+        <pc:spChg chg="del">
+          <ac:chgData name="" userId="" providerId="" clId="Web-{CCD5D920-994C-4664-82A6-A432AB54255C}" dt="2026-09-03T13:37:13.460" v="1" actId="34807"/>
+          <ac:spMkLst>
+            <pc:docMk/>
+            <pc:sldMk cId="1477863308" sldId="1272"/>
+            <ac:spMk id="54" creationId="{DE1C9BC9-BC34-539C-04A3-4856AD061FE5}"/>
+          </ac:spMkLst>
+        </pc:spChg>
+        <pc:spChg chg="add mod">
+          <ac:chgData name="" userId="" providerId="" clId="Web-{CCD5D920-994C-4664-82A6-A432AB54255C}" dt="2026-09-03T13:37:13.460" v="1" actId="34807"/>
+          <ac:spMkLst>
+            <pc:docMk/>
+            <pc:sldMk cId="1477863308" sldId="1272"/>
+            <ac:spMk id="101" creationId="{CD7FCE81-8B61-DFCE-B072-237D96BA77BC}"/>
+          </ac:spMkLst>
+        </pc:spChg>
+        <pc:spChg chg="add mod">
+          <ac:chgData name="" userId="" providerId="" clId="Web-{CCD5D920-994C-4664-82A6-A432AB54255C}" dt="2026-09-03T13:37:13.460" v="1" actId="34807"/>
+          <ac:spMkLst>
+            <pc:docMk/>
+            <pc:sldMk cId="1477863308" sldId="1272"/>
+            <ac:spMk id="102" creationId="{6E8FF1EB-4F5B-E8C5-FADB-90CFAA865576}"/>
+          </ac:spMkLst>
+        </pc:spChg>
+      </pc:sldChg>
+      <pc:sldChg chg="addSp delSp modSp">
+        <pc:chgData name="" userId="" providerId="" clId="Web-{CCD5D920-994C-4664-82A6-A432AB54255C}" dt="2026-09-03T13:40:46.388" v="4" actId="34807"/>
+        <pc:sldMkLst>
+          <pc:docMk/>
+          <pc:sldMk cId="1979740094" sldId="1478"/>
+        </pc:sldMkLst>
+        <pc:spChg chg="mod">
+          <ac:chgData name="" userId="" providerId="" clId="Web-{CCD5D920-994C-4664-82A6-A432AB54255C}" dt="2026-09-03T13:40:46.388" v="4" actId="34807"/>
+          <ac:spMkLst>
+            <pc:docMk/>
+            <pc:sldMk cId="1979740094" sldId="1478"/>
+            <ac:spMk id="73" creationId="{D6501122-5DCA-DA16-81AD-6F1E11374D21}"/>
+          </ac:spMkLst>
+        </pc:spChg>
+        <pc:spChg chg="mod">
+          <ac:chgData name="" userId="" providerId="" clId="Web-{CCD5D920-994C-4664-82A6-A432AB54255C}" dt="2026-09-03T13:40:46.388" v="4" actId="34807"/>
+          <ac:spMkLst>
+            <pc:docMk/>
+            <pc:sldMk cId="1979740094" sldId="1478"/>
+            <ac:spMk id="76" creationId="{887136E6-94DC-D998-1807-09D4C7528FD7}"/>
+          </ac:spMkLst>
+        </pc:spChg>
+        <pc:spChg chg="del">
+          <ac:chgData name="" userId="" providerId="" clId="Web-{CCD5D920-994C-4664-82A6-A432AB54255C}" dt="2026-09-03T13:37:13.460" v="1" actId="34807"/>
+          <ac:spMkLst>
+            <pc:docMk/>
+            <pc:sldMk cId="1979740094" sldId="1478"/>
+            <ac:spMk id="77" creationId="{FA6239CB-0FA8-D9F7-4FEF-BB8081B72448}"/>
+          </ac:spMkLst>
+        </pc:spChg>
+        <pc:spChg chg="del">
+          <ac:chgData name="" userId="" providerId="" clId="Web-{CCD5D920-994C-4664-82A6-A432AB54255C}" dt="2026-09-03T13:37:13.460" v="1" actId="34807"/>
+          <ac:spMkLst>
+            <pc:docMk/>
+            <pc:sldMk cId="1979740094" sldId="1478"/>
+            <ac:spMk id="78" creationId="{CC4B7D84-9553-6F08-584E-9CB72382C1CC}"/>
+          </ac:spMkLst>
+        </pc:spChg>
+        <pc:spChg chg="del">
+          <ac:chgData name="" userId="" providerId="" clId="Web-{CCD5D920-994C-4664-82A6-A432AB54255C}" dt="2026-09-03T13:37:13.460" v="1" actId="34807"/>
+          <ac:spMkLst>
+            <pc:docMk/>
+            <pc:sldMk cId="1979740094" sldId="1478"/>
+            <ac:spMk id="80" creationId="{FF511306-CBD8-3836-F0BC-65F0361667AC}"/>
+          </ac:spMkLst>
+        </pc:spChg>
+        <pc:spChg chg="del">
+          <ac:chgData name="" userId="" providerId="" clId="Web-{CCD5D920-994C-4664-82A6-A432AB54255C}" dt="2026-09-03T13:37:13.460" v="1" actId="34807"/>
+          <ac:spMkLst>
+            <pc:docMk/>
+            <pc:sldMk cId="1979740094" sldId="1478"/>
+            <ac:spMk id="81" creationId="{740EB8AA-DAEF-D660-5999-C52747D17C52}"/>
+          </ac:spMkLst>
+        </pc:spChg>
+        <pc:spChg chg="mod">
+          <ac:chgData name="" userId="" providerId="" clId="Web-{CCD5D920-994C-4664-82A6-A432AB54255C}" dt="2026-09-03T13:40:46.388" v="4" actId="34807"/>
+          <ac:spMkLst>
+            <pc:docMk/>
+            <pc:sldMk cId="1979740094" sldId="1478"/>
+            <ac:spMk id="82" creationId="{91E5DCEF-869B-9730-AD0A-AD72EFAD0C40}"/>
+          </ac:spMkLst>
+        </pc:spChg>
+        <pc:spChg chg="del">
+          <ac:chgData name="" userId="" providerId="" clId="Web-{CCD5D920-994C-4664-82A6-A432AB54255C}" dt="2026-09-03T13:37:13.460" v="1" actId="34807"/>
+          <ac:spMkLst>
+            <pc:docMk/>
+            <pc:sldMk cId="1979740094" sldId="1478"/>
+            <ac:spMk id="83" creationId="{85070730-C7FC-B2A3-7767-2BF9209D0449}"/>
+          </ac:spMkLst>
+        </pc:spChg>
+        <pc:spChg chg="mod">
+          <ac:chgData name="" userId="" providerId="" clId="Web-{CCD5D920-994C-4664-82A6-A432AB54255C}" dt="2026-09-03T13:40:46.388" v="4" actId="34807"/>
+          <ac:spMkLst>
+            <pc:docMk/>
+            <pc:sldMk cId="1979740094" sldId="1478"/>
+            <ac:spMk id="85" creationId="{8EEC06E4-3AC4-A68B-BEC7-2EAECC2D2162}"/>
+          </ac:spMkLst>
+        </pc:spChg>
+        <pc:spChg chg="del">
+          <ac:chgData name="" userId="" providerId="" clId="Web-{CCD5D920-994C-4664-82A6-A432AB54255C}" dt="2026-09-03T13:37:13.460" v="1" actId="34807"/>
+          <ac:spMkLst>
+            <pc:docMk/>
+            <pc:sldMk cId="1979740094" sldId="1478"/>
+            <ac:spMk id="88" creationId="{1D548511-C91B-C870-52B1-AECF1D7DC9B4}"/>
+          </ac:spMkLst>
+        </pc:spChg>
+        <pc:spChg chg="add mod">
+          <ac:chgData name="" userId="" providerId="" clId="Web-{CCD5D920-994C-4664-82A6-A432AB54255C}" dt="2026-09-03T13:40:46.388" v="4" actId="34807"/>
+          <ac:spMkLst>
+            <pc:docMk/>
+            <pc:sldMk cId="1979740094" sldId="1478"/>
+            <ac:spMk id="115" creationId="{AD9A7919-A393-C081-1C47-F338F67D34BE}"/>
+          </ac:spMkLst>
+        </pc:spChg>
+        <pc:spChg chg="mod">
+          <ac:chgData name="" userId="" providerId="" clId="Web-{CCD5D920-994C-4664-82A6-A432AB54255C}" dt="2026-09-03T13:40:46.388" v="4" actId="34807"/>
+          <ac:spMkLst>
+            <pc:docMk/>
+            <pc:sldMk cId="1979740094" sldId="1478"/>
+            <ac:spMk id="117" creationId="{F27FD83C-4B8F-7428-156F-53F450A09B7F}"/>
+          </ac:spMkLst>
+        </pc:spChg>
+        <pc:spChg chg="add mod">
+          <ac:chgData name="" userId="" providerId="" clId="Web-{CCD5D920-994C-4664-82A6-A432AB54255C}" dt="2026-09-03T13:40:46.388" v="4" actId="34807"/>
+          <ac:spMkLst>
+            <pc:docMk/>
+            <pc:sldMk cId="1979740094" sldId="1478"/>
+            <ac:spMk id="120" creationId="{1DAAEB23-B8F9-CA68-3548-354D2F8932A5}"/>
+          </ac:spMkLst>
+        </pc:spChg>
+        <pc:spChg chg="mod">
+          <ac:chgData name="" userId="" providerId="" clId="Web-{CCD5D920-994C-4664-82A6-A432AB54255C}" dt="2026-09-03T13:40:46.388" v="4" actId="34807"/>
+          <ac:spMkLst>
+            <pc:docMk/>
+            <pc:sldMk cId="1979740094" sldId="1478"/>
+            <ac:spMk id="123" creationId="{DB0AF43A-0930-11F4-8969-34D28FB47053}"/>
+          </ac:spMkLst>
+        </pc:spChg>
+        <pc:spChg chg="add mod">
+          <ac:chgData name="" userId="" providerId="" clId="Web-{CCD5D920-994C-4664-82A6-A432AB54255C}" dt="2026-09-03T13:40:46.388" v="4" actId="34807"/>
+          <ac:spMkLst>
+            <pc:docMk/>
+            <pc:sldMk cId="1979740094" sldId="1478"/>
+            <ac:spMk id="125" creationId="{9129AAB2-B0A6-6C87-CE03-1E24D2F96DA8}"/>
+          </ac:spMkLst>
+        </pc:spChg>
+        <pc:spChg chg="add mod">
+          <ac:chgData name="" userId="" providerId="" clId="Web-{CCD5D920-994C-4664-82A6-A432AB54255C}" dt="2026-09-03T13:40:46.388" v="4" actId="34807"/>
+          <ac:spMkLst>
+            <pc:docMk/>
+            <pc:sldMk cId="1979740094" sldId="1478"/>
+            <ac:spMk id="126" creationId="{11FE642F-3D75-408B-FDF1-43E909DF7FD8}"/>
+          </ac:spMkLst>
+        </pc:spChg>
+      </pc:sldChg>
+    </pc:docChg>
+  </pc:docChgLst>
   <pc:docChgLst>
     <pc:chgData clId="Web-{6DACDC40-4E18-4CD2-BCA2-CED5C0D008C3}"/>
     <pc:docChg chg="addSld delSld modSld">
@@ -677,321 +992,6 @@
             <pc:docMk/>
             <pc:sldMk cId="1979740094" sldId="1478"/>
             <ac:spMk id="88" creationId="{1D548511-C91B-C870-52B1-AECF1D7DC9B4}"/>
-          </ac:spMkLst>
-        </pc:spChg>
-      </pc:sldChg>
-    </pc:docChg>
-  </pc:docChgLst>
-  <pc:docChgLst>
-    <pc:chgData clId="Web-{CCD5D920-994C-4664-82A6-A432AB54255C}"/>
-    <pc:docChg chg="modSld">
-      <pc:chgData name="" userId="" providerId="" clId="Web-{CCD5D920-994C-4664-82A6-A432AB54255C}" dt="2026-09-03T13:40:46.388" v="4" actId="34807"/>
-      <pc:docMkLst>
-        <pc:docMk/>
-      </pc:docMkLst>
-      <pc:sldChg chg="addSp delSp modSp">
-        <pc:chgData name="" userId="" providerId="" clId="Web-{CCD5D920-994C-4664-82A6-A432AB54255C}" dt="2026-09-03T13:37:13.460" v="1" actId="34807"/>
-        <pc:sldMkLst>
-          <pc:docMk/>
-          <pc:sldMk cId="620554265" sldId="458"/>
-        </pc:sldMkLst>
-        <pc:spChg chg="del">
-          <ac:chgData name="" userId="" providerId="" clId="Web-{CCD5D920-994C-4664-82A6-A432AB54255C}" dt="2026-09-03T13:37:13.460" v="1" actId="34807"/>
-          <ac:spMkLst>
-            <pc:docMk/>
-            <pc:sldMk cId="620554265" sldId="458"/>
-            <ac:spMk id="5" creationId="{2D20B5BF-C407-3550-9B52-71099F6E45F9}"/>
-          </ac:spMkLst>
-        </pc:spChg>
-        <pc:spChg chg="add mod">
-          <ac:chgData name="" userId="" providerId="" clId="Web-{CCD5D920-994C-4664-82A6-A432AB54255C}" dt="2026-09-03T13:37:13.460" v="1" actId="34807"/>
-          <ac:spMkLst>
-            <pc:docMk/>
-            <pc:sldMk cId="620554265" sldId="458"/>
-            <ac:spMk id="93" creationId="{7F7B456F-A856-A32F-74CD-9E0B8FEAC8C1}"/>
-          </ac:spMkLst>
-        </pc:spChg>
-      </pc:sldChg>
-      <pc:sldChg chg="addSp delSp modSp">
-        <pc:chgData name="" userId="" providerId="" clId="Web-{CCD5D920-994C-4664-82A6-A432AB54255C}" dt="2026-09-03T13:35:52.818" v="0" actId="34807"/>
-        <pc:sldMkLst>
-          <pc:docMk/>
-          <pc:sldMk cId="1734722321" sldId="660"/>
-        </pc:sldMkLst>
-        <pc:spChg chg="del">
-          <ac:chgData name="" userId="" providerId="" clId="Web-{CCD5D920-994C-4664-82A6-A432AB54255C}" dt="2026-09-03T13:35:52.818" v="0" actId="34807"/>
-          <ac:spMkLst>
-            <pc:docMk/>
-            <pc:sldMk cId="1734722321" sldId="660"/>
-            <ac:spMk id="16" creationId="{64E45013-10A8-BB52-7AD7-73DFCCE6D259}"/>
-          </ac:spMkLst>
-        </pc:spChg>
-        <pc:spChg chg="add mod">
-          <ac:chgData name="" userId="" providerId="" clId="Web-{CCD5D920-994C-4664-82A6-A432AB54255C}" dt="2026-09-03T13:35:52.818" v="0" actId="34807"/>
-          <ac:spMkLst>
-            <pc:docMk/>
-            <pc:sldMk cId="1734722321" sldId="660"/>
-            <ac:spMk id="90" creationId="{4A5A6A0F-FA9B-7D4E-C164-8A4A1C2324F1}"/>
-          </ac:spMkLst>
-        </pc:spChg>
-        <pc:spChg chg="add mod">
-          <ac:chgData name="" userId="" providerId="" clId="Web-{CCD5D920-994C-4664-82A6-A432AB54255C}" dt="2026-09-03T13:35:52.818" v="0" actId="34807"/>
-          <ac:spMkLst>
-            <pc:docMk/>
-            <pc:sldMk cId="1734722321" sldId="660"/>
-            <ac:spMk id="91" creationId="{962EC4BF-5C3A-3FDE-E761-3401BE09A1D7}"/>
-          </ac:spMkLst>
-        </pc:spChg>
-      </pc:sldChg>
-      <pc:sldChg chg="addSp delSp modSp">
-        <pc:chgData name="" userId="" providerId="" clId="Web-{CCD5D920-994C-4664-82A6-A432AB54255C}" dt="2026-09-03T13:38:12.430" v="3" actId="34807"/>
-        <pc:sldMkLst>
-          <pc:docMk/>
-          <pc:sldMk cId="4070091250" sldId="863"/>
-        </pc:sldMkLst>
-        <pc:spChg chg="add mod">
-          <ac:chgData name="" userId="" providerId="" clId="Web-{CCD5D920-994C-4664-82A6-A432AB54255C}" dt="2026-09-03T13:37:32.179" v="2" actId="34807"/>
-          <ac:spMkLst>
-            <pc:docMk/>
-            <pc:sldMk cId="4070091250" sldId="863"/>
-            <ac:spMk id="128" creationId="{D2014E26-87E2-A853-C3DC-0819C6DC0BEE}"/>
-          </ac:spMkLst>
-        </pc:spChg>
-        <pc:graphicFrameChg chg="add mod">
-          <ac:chgData name="" userId="" providerId="" clId="Web-{CCD5D920-994C-4664-82A6-A432AB54255C}" dt="2026-09-03T13:38:12.430" v="3" actId="34807"/>
-          <ac:graphicFrameMkLst>
-            <pc:docMk/>
-            <pc:sldMk cId="4070091250" sldId="863"/>
-            <ac:graphicFrameMk id="3" creationId="{8195C725-3FFD-5D81-0F1E-A0882D4A175D}"/>
-          </ac:graphicFrameMkLst>
-        </pc:graphicFrameChg>
-        <pc:graphicFrameChg chg="del">
-          <ac:chgData name="" userId="" providerId="" clId="Web-{CCD5D920-994C-4664-82A6-A432AB54255C}" dt="2026-09-03T13:37:32.179" v="2" actId="34807"/>
-          <ac:graphicFrameMkLst>
-            <pc:docMk/>
-            <pc:sldMk cId="4070091250" sldId="863"/>
-            <ac:graphicFrameMk id="4" creationId="{3C81E9AE-D809-9B2A-98EA-172B81940050}"/>
-          </ac:graphicFrameMkLst>
-        </pc:graphicFrameChg>
-      </pc:sldChg>
-      <pc:sldChg chg="addSp delSp modSp">
-        <pc:chgData name="" userId="" providerId="" clId="Web-{CCD5D920-994C-4664-82A6-A432AB54255C}" dt="2026-09-03T13:37:13.460" v="1" actId="34807"/>
-        <pc:sldMkLst>
-          <pc:docMk/>
-          <pc:sldMk cId="2294594786" sldId="1067"/>
-        </pc:sldMkLst>
-        <pc:spChg chg="del">
-          <ac:chgData name="" userId="" providerId="" clId="Web-{CCD5D920-994C-4664-82A6-A432AB54255C}" dt="2026-09-03T13:37:13.460" v="1" actId="34807"/>
-          <ac:spMkLst>
-            <pc:docMk/>
-            <pc:sldMk cId="2294594786" sldId="1067"/>
-            <ac:spMk id="36" creationId="{5790311E-3373-517A-9762-7B0811EAB349}"/>
-          </ac:spMkLst>
-        </pc:spChg>
-        <pc:spChg chg="del">
-          <ac:chgData name="" userId="" providerId="" clId="Web-{CCD5D920-994C-4664-82A6-A432AB54255C}" dt="2026-09-03T13:37:13.460" v="1" actId="34807"/>
-          <ac:spMkLst>
-            <pc:docMk/>
-            <pc:sldMk cId="2294594786" sldId="1067"/>
-            <ac:spMk id="53" creationId="{3DD5F1D2-38B4-14E5-A7A9-6129F4ED85BF}"/>
-          </ac:spMkLst>
-        </pc:spChg>
-        <pc:spChg chg="add mod">
-          <ac:chgData name="" userId="" providerId="" clId="Web-{CCD5D920-994C-4664-82A6-A432AB54255C}" dt="2026-09-03T13:37:13.460" v="1" actId="34807"/>
-          <ac:spMkLst>
-            <pc:docMk/>
-            <pc:sldMk cId="2294594786" sldId="1067"/>
-            <ac:spMk id="96" creationId="{46F7271E-7199-5FA2-66EB-D7BBA057E2F4}"/>
-          </ac:spMkLst>
-        </pc:spChg>
-        <pc:spChg chg="add mod">
-          <ac:chgData name="" userId="" providerId="" clId="Web-{CCD5D920-994C-4664-82A6-A432AB54255C}" dt="2026-09-03T13:37:13.460" v="1" actId="34807"/>
-          <ac:spMkLst>
-            <pc:docMk/>
-            <pc:sldMk cId="2294594786" sldId="1067"/>
-            <ac:spMk id="97" creationId="{9AAFC44E-E5D0-70A9-A2AC-3CA93662FAC2}"/>
-          </ac:spMkLst>
-        </pc:spChg>
-        <pc:spChg chg="add mod">
-          <ac:chgData name="" userId="" providerId="" clId="Web-{CCD5D920-994C-4664-82A6-A432AB54255C}" dt="2026-09-03T13:37:13.460" v="1" actId="34807"/>
-          <ac:spMkLst>
-            <pc:docMk/>
-            <pc:sldMk cId="2294594786" sldId="1067"/>
-            <ac:spMk id="98" creationId="{34557469-54A4-F14C-BF87-C474EB3C0796}"/>
-          </ac:spMkLst>
-        </pc:spChg>
-        <pc:spChg chg="add mod">
-          <ac:chgData name="" userId="" providerId="" clId="Web-{CCD5D920-994C-4664-82A6-A432AB54255C}" dt="2026-09-03T13:37:13.460" v="1" actId="34807"/>
-          <ac:spMkLst>
-            <pc:docMk/>
-            <pc:sldMk cId="2294594786" sldId="1067"/>
-            <ac:spMk id="99" creationId="{B1E14D00-2D20-71B0-C3DF-5A0A3FC0F7AD}"/>
-          </ac:spMkLst>
-        </pc:spChg>
-      </pc:sldChg>
-      <pc:sldChg chg="addSp delSp modSp">
-        <pc:chgData name="" userId="" providerId="" clId="Web-{CCD5D920-994C-4664-82A6-A432AB54255C}" dt="2026-09-03T13:37:13.460" v="1" actId="34807"/>
-        <pc:sldMkLst>
-          <pc:docMk/>
-          <pc:sldMk cId="1477863308" sldId="1272"/>
-        </pc:sldMkLst>
-        <pc:spChg chg="del">
-          <ac:chgData name="" userId="" providerId="" clId="Web-{CCD5D920-994C-4664-82A6-A432AB54255C}" dt="2026-09-03T13:37:13.460" v="1" actId="34807"/>
-          <ac:spMkLst>
-            <pc:docMk/>
-            <pc:sldMk cId="1477863308" sldId="1272"/>
-            <ac:spMk id="54" creationId="{DE1C9BC9-BC34-539C-04A3-4856AD061FE5}"/>
-          </ac:spMkLst>
-        </pc:spChg>
-        <pc:spChg chg="add mod">
-          <ac:chgData name="" userId="" providerId="" clId="Web-{CCD5D920-994C-4664-82A6-A432AB54255C}" dt="2026-09-03T13:37:13.460" v="1" actId="34807"/>
-          <ac:spMkLst>
-            <pc:docMk/>
-            <pc:sldMk cId="1477863308" sldId="1272"/>
-            <ac:spMk id="101" creationId="{CD7FCE81-8B61-DFCE-B072-237D96BA77BC}"/>
-          </ac:spMkLst>
-        </pc:spChg>
-        <pc:spChg chg="add mod">
-          <ac:chgData name="" userId="" providerId="" clId="Web-{CCD5D920-994C-4664-82A6-A432AB54255C}" dt="2026-09-03T13:37:13.460" v="1" actId="34807"/>
-          <ac:spMkLst>
-            <pc:docMk/>
-            <pc:sldMk cId="1477863308" sldId="1272"/>
-            <ac:spMk id="102" creationId="{6E8FF1EB-4F5B-E8C5-FADB-90CFAA865576}"/>
-          </ac:spMkLst>
-        </pc:spChg>
-      </pc:sldChg>
-      <pc:sldChg chg="addSp delSp modSp">
-        <pc:chgData name="" userId="" providerId="" clId="Web-{CCD5D920-994C-4664-82A6-A432AB54255C}" dt="2026-09-03T13:40:46.388" v="4" actId="34807"/>
-        <pc:sldMkLst>
-          <pc:docMk/>
-          <pc:sldMk cId="1979740094" sldId="1478"/>
-        </pc:sldMkLst>
-        <pc:spChg chg="mod">
-          <ac:chgData name="" userId="" providerId="" clId="Web-{CCD5D920-994C-4664-82A6-A432AB54255C}" dt="2026-09-03T13:40:46.388" v="4" actId="34807"/>
-          <ac:spMkLst>
-            <pc:docMk/>
-            <pc:sldMk cId="1979740094" sldId="1478"/>
-            <ac:spMk id="73" creationId="{D6501122-5DCA-DA16-81AD-6F1E11374D21}"/>
-          </ac:spMkLst>
-        </pc:spChg>
-        <pc:spChg chg="mod">
-          <ac:chgData name="" userId="" providerId="" clId="Web-{CCD5D920-994C-4664-82A6-A432AB54255C}" dt="2026-09-03T13:40:46.388" v="4" actId="34807"/>
-          <ac:spMkLst>
-            <pc:docMk/>
-            <pc:sldMk cId="1979740094" sldId="1478"/>
-            <ac:spMk id="76" creationId="{887136E6-94DC-D998-1807-09D4C7528FD7}"/>
-          </ac:spMkLst>
-        </pc:spChg>
-        <pc:spChg chg="del">
-          <ac:chgData name="" userId="" providerId="" clId="Web-{CCD5D920-994C-4664-82A6-A432AB54255C}" dt="2026-09-03T13:37:13.460" v="1" actId="34807"/>
-          <ac:spMkLst>
-            <pc:docMk/>
-            <pc:sldMk cId="1979740094" sldId="1478"/>
-            <ac:spMk id="77" creationId="{FA6239CB-0FA8-D9F7-4FEF-BB8081B72448}"/>
-          </ac:spMkLst>
-        </pc:spChg>
-        <pc:spChg chg="del">
-          <ac:chgData name="" userId="" providerId="" clId="Web-{CCD5D920-994C-4664-82A6-A432AB54255C}" dt="2026-09-03T13:37:13.460" v="1" actId="34807"/>
-          <ac:spMkLst>
-            <pc:docMk/>
-            <pc:sldMk cId="1979740094" sldId="1478"/>
-            <ac:spMk id="78" creationId="{CC4B7D84-9553-6F08-584E-9CB72382C1CC}"/>
-          </ac:spMkLst>
-        </pc:spChg>
-        <pc:spChg chg="del">
-          <ac:chgData name="" userId="" providerId="" clId="Web-{CCD5D920-994C-4664-82A6-A432AB54255C}" dt="2026-09-03T13:37:13.460" v="1" actId="34807"/>
-          <ac:spMkLst>
-            <pc:docMk/>
-            <pc:sldMk cId="1979740094" sldId="1478"/>
-            <ac:spMk id="80" creationId="{FF511306-CBD8-3836-F0BC-65F0361667AC}"/>
-          </ac:spMkLst>
-        </pc:spChg>
-        <pc:spChg chg="del">
-          <ac:chgData name="" userId="" providerId="" clId="Web-{CCD5D920-994C-4664-82A6-A432AB54255C}" dt="2026-09-03T13:37:13.460" v="1" actId="34807"/>
-          <ac:spMkLst>
-            <pc:docMk/>
-            <pc:sldMk cId="1979740094" sldId="1478"/>
-            <ac:spMk id="81" creationId="{740EB8AA-DAEF-D660-5999-C52747D17C52}"/>
-          </ac:spMkLst>
-        </pc:spChg>
-        <pc:spChg chg="mod">
-          <ac:chgData name="" userId="" providerId="" clId="Web-{CCD5D920-994C-4664-82A6-A432AB54255C}" dt="2026-09-03T13:40:46.388" v="4" actId="34807"/>
-          <ac:spMkLst>
-            <pc:docMk/>
-            <pc:sldMk cId="1979740094" sldId="1478"/>
-            <ac:spMk id="82" creationId="{91E5DCEF-869B-9730-AD0A-AD72EFAD0C40}"/>
-          </ac:spMkLst>
-        </pc:spChg>
-        <pc:spChg chg="del">
-          <ac:chgData name="" userId="" providerId="" clId="Web-{CCD5D920-994C-4664-82A6-A432AB54255C}" dt="2026-09-03T13:37:13.460" v="1" actId="34807"/>
-          <ac:spMkLst>
-            <pc:docMk/>
-            <pc:sldMk cId="1979740094" sldId="1478"/>
-            <ac:spMk id="83" creationId="{85070730-C7FC-B2A3-7767-2BF9209D0449}"/>
-          </ac:spMkLst>
-        </pc:spChg>
-        <pc:spChg chg="mod">
-          <ac:chgData name="" userId="" providerId="" clId="Web-{CCD5D920-994C-4664-82A6-A432AB54255C}" dt="2026-09-03T13:40:46.388" v="4" actId="34807"/>
-          <ac:spMkLst>
-            <pc:docMk/>
-            <pc:sldMk cId="1979740094" sldId="1478"/>
-            <ac:spMk id="85" creationId="{8EEC06E4-3AC4-A68B-BEC7-2EAECC2D2162}"/>
-          </ac:spMkLst>
-        </pc:spChg>
-        <pc:spChg chg="del">
-          <ac:chgData name="" userId="" providerId="" clId="Web-{CCD5D920-994C-4664-82A6-A432AB54255C}" dt="2026-09-03T13:37:13.460" v="1" actId="34807"/>
-          <ac:spMkLst>
-            <pc:docMk/>
-            <pc:sldMk cId="1979740094" sldId="1478"/>
-            <ac:spMk id="88" creationId="{1D548511-C91B-C870-52B1-AECF1D7DC9B4}"/>
-          </ac:spMkLst>
-        </pc:spChg>
-        <pc:spChg chg="add mod">
-          <ac:chgData name="" userId="" providerId="" clId="Web-{CCD5D920-994C-4664-82A6-A432AB54255C}" dt="2026-09-03T13:40:46.388" v="4" actId="34807"/>
-          <ac:spMkLst>
-            <pc:docMk/>
-            <pc:sldMk cId="1979740094" sldId="1478"/>
-            <ac:spMk id="115" creationId="{AD9A7919-A393-C081-1C47-F338F67D34BE}"/>
-          </ac:spMkLst>
-        </pc:spChg>
-        <pc:spChg chg="mod">
-          <ac:chgData name="" userId="" providerId="" clId="Web-{CCD5D920-994C-4664-82A6-A432AB54255C}" dt="2026-09-03T13:40:46.388" v="4" actId="34807"/>
-          <ac:spMkLst>
-            <pc:docMk/>
-            <pc:sldMk cId="1979740094" sldId="1478"/>
-            <ac:spMk id="117" creationId="{F27FD83C-4B8F-7428-156F-53F450A09B7F}"/>
-          </ac:spMkLst>
-        </pc:spChg>
-        <pc:spChg chg="add mod">
-          <ac:chgData name="" userId="" providerId="" clId="Web-{CCD5D920-994C-4664-82A6-A432AB54255C}" dt="2026-09-03T13:40:46.388" v="4" actId="34807"/>
-          <ac:spMkLst>
-            <pc:docMk/>
-            <pc:sldMk cId="1979740094" sldId="1478"/>
-            <ac:spMk id="120" creationId="{1DAAEB23-B8F9-CA68-3548-354D2F8932A5}"/>
-          </ac:spMkLst>
-        </pc:spChg>
-        <pc:spChg chg="mod">
-          <ac:chgData name="" userId="" providerId="" clId="Web-{CCD5D920-994C-4664-82A6-A432AB54255C}" dt="2026-09-03T13:40:46.388" v="4" actId="34807"/>
-          <ac:spMkLst>
-            <pc:docMk/>
-            <pc:sldMk cId="1979740094" sldId="1478"/>
-            <ac:spMk id="123" creationId="{DB0AF43A-0930-11F4-8969-34D28FB47053}"/>
-          </ac:spMkLst>
-        </pc:spChg>
-        <pc:spChg chg="add mod">
-          <ac:chgData name="" userId="" providerId="" clId="Web-{CCD5D920-994C-4664-82A6-A432AB54255C}" dt="2026-09-03T13:40:46.388" v="4" actId="34807"/>
-          <ac:spMkLst>
-            <pc:docMk/>
-            <pc:sldMk cId="1979740094" sldId="1478"/>
-            <ac:spMk id="125" creationId="{9129AAB2-B0A6-6C87-CE03-1E24D2F96DA8}"/>
-          </ac:spMkLst>
-        </pc:spChg>
-        <pc:spChg chg="add mod">
-          <ac:chgData name="" userId="" providerId="" clId="Web-{CCD5D920-994C-4664-82A6-A432AB54255C}" dt="2026-09-03T13:40:46.388" v="4" actId="34807"/>
-          <ac:spMkLst>
-            <pc:docMk/>
-            <pc:sldMk cId="1979740094" sldId="1478"/>
-            <ac:spMk id="126" creationId="{11FE642F-3D75-408B-FDF1-43E909DF7FD8}"/>
           </ac:spMkLst>
         </pc:spChg>
       </pc:sldChg>
@@ -2038,7 +2038,7 @@
           <a:p>
             <a:fld id="{D5D1EC30-5B0B-48D0-A1A8-66A96720DF24}" type="datetimeFigureOut">
               <a:rPr lang="en-US" smtClean="0"/>
-              <a:t>9/3/2026</a:t>
+              <a:t>03-Sep-26</a:t>
             </a:fld>
             <a:endParaRPr lang="en-US"/>
           </a:p>
@@ -2215,7 +2215,7 @@
           <a:p>
             <a:fld id="{69F68A4D-42A7-45F7-9930-00E8DCB48D7E}" type="datetimeFigureOut">
               <a:rPr lang="en-US" smtClean="0"/>
-              <a:t>9/3/2026</a:t>
+              <a:t>03-Sep-26</a:t>
             </a:fld>
             <a:endParaRPr lang="en-US"/>
           </a:p>
@@ -27085,28 +27085,6 @@
 </file>
 
 <file path=customXml/item1.xml><?xml version="1.0" encoding="utf-8"?>
-<p:properties xmlns:p="http://schemas.microsoft.com/office/2006/metadata/properties" xmlns:xsi="http://www.w3.org/2001/XMLSchema-instance" xmlns:pc="http://schemas.microsoft.com/office/infopath/2007/PartnerControls">
-  <documentManagement>
-    <_ip_UnifiedCompliancePolicyUIAction xmlns="http://schemas.microsoft.com/sharepoint/v3" xsi:nil="true"/>
-    <TaxCatchAll xmlns="9ece1660-89e4-4efe-8613-f619625afc8d" xsi:nil="true"/>
-    <_ip_UnifiedCompliancePolicyProperties xmlns="http://schemas.microsoft.com/sharepoint/v3" xsi:nil="true"/>
-    <lcf76f155ced4ddcb4097134ff3c332f xmlns="debf2d1a-3119-443f-9311-2f3fb0fd7de8">
-      <Terms xmlns="http://schemas.microsoft.com/office/infopath/2007/PartnerControls"/>
-    </lcf76f155ced4ddcb4097134ff3c332f>
-  </documentManagement>
-</p:properties>
-</file>
-
-<file path=customXml/item2.xml><?xml version="1.0" encoding="utf-8"?>
-<?mso-contentType ?>
-<FormTemplates xmlns="http://schemas.microsoft.com/sharepoint/v3/contenttype/forms">
-  <Display>DocumentLibraryForm</Display>
-  <Edit>DocumentLibraryForm</Edit>
-  <New>DocumentLibraryForm</New>
-</FormTemplates>
-</file>
-
-<file path=customXml/item3.xml><?xml version="1.0" encoding="utf-8"?>
 <ct:contentTypeSchema xmlns:ct="http://schemas.microsoft.com/office/2006/metadata/contentType" xmlns:ma="http://schemas.microsoft.com/office/2006/metadata/properties/metaAttributes" ct:_="" ma:_="" ma:contentTypeName="Document" ma:contentTypeID="0x01010042410C10365B41458A488A2E06A7CDDA" ma:contentTypeVersion="16" ma:contentTypeDescription="Create a new document." ma:contentTypeScope="" ma:versionID="8fc8c9c986ff763fb0d30ebcc45645fb">
   <xsd:schema xmlns:xsd="http://www.w3.org/2001/XMLSchema" xmlns:xs="http://www.w3.org/2001/XMLSchema" xmlns:p="http://schemas.microsoft.com/office/2006/metadata/properties" xmlns:ns1="http://schemas.microsoft.com/sharepoint/v3" xmlns:ns2="debf2d1a-3119-443f-9311-2f3fb0fd7de8" xmlns:ns3="9ece1660-89e4-4efe-8613-f619625afc8d" targetNamespace="http://schemas.microsoft.com/office/2006/metadata/properties" ma:root="true" ma:fieldsID="8a6a739d9051ad82eb6b3b4cb1429ef8" ns1:_="" ns2:_="" ns3:_="">
     <xsd:import namespace="http://schemas.microsoft.com/sharepoint/v3"/>
@@ -27336,18 +27314,44 @@
 </ct:contentTypeSchema>
 </file>
 
+<file path=customXml/item2.xml><?xml version="1.0" encoding="utf-8"?>
+<?mso-contentType ?>
+<FormTemplates xmlns="http://schemas.microsoft.com/sharepoint/v3/contenttype/forms">
+  <Display>DocumentLibraryForm</Display>
+  <Edit>DocumentLibraryForm</Edit>
+  <New>DocumentLibraryForm</New>
+</FormTemplates>
+</file>
+
+<file path=customXml/item3.xml><?xml version="1.0" encoding="utf-8"?>
+<p:properties xmlns:p="http://schemas.microsoft.com/office/2006/metadata/properties" xmlns:xsi="http://www.w3.org/2001/XMLSchema-instance" xmlns:pc="http://schemas.microsoft.com/office/infopath/2007/PartnerControls">
+  <documentManagement>
+    <_ip_UnifiedCompliancePolicyUIAction xmlns="http://schemas.microsoft.com/sharepoint/v3" xsi:nil="true"/>
+    <TaxCatchAll xmlns="9ece1660-89e4-4efe-8613-f619625afc8d" xsi:nil="true"/>
+    <_ip_UnifiedCompliancePolicyProperties xmlns="http://schemas.microsoft.com/sharepoint/v3" xsi:nil="true"/>
+    <lcf76f155ced4ddcb4097134ff3c332f xmlns="debf2d1a-3119-443f-9311-2f3fb0fd7de8">
+      <Terms xmlns="http://schemas.microsoft.com/office/infopath/2007/PartnerControls"/>
+    </lcf76f155ced4ddcb4097134ff3c332f>
+  </documentManagement>
+</p:properties>
+</file>
+
 <file path=customXml/itemProps1.xml><?xml version="1.0" encoding="utf-8"?>
-<ds:datastoreItem xmlns:ds="http://schemas.openxmlformats.org/officeDocument/2006/customXml" ds:itemID="{A70E81DD-77AF-45EC-82F0-7316C24EE21B}">
+<ds:datastoreItem xmlns:ds="http://schemas.openxmlformats.org/officeDocument/2006/customXml" ds:itemID="{F5F26032-4E8C-41C9-81EF-C4526616B487}">
   <ds:schemaRefs>
-    <ds:schemaRef ds:uri="b666c4c0-4622-40b9-a367-d6c6c5520eb5"/>
-    <ds:schemaRef ds:uri="http://purl.org/dc/dcmitype/"/>
+    <ds:schemaRef ds:uri="http://schemas.microsoft.com/office/2006/metadata/contentType"/>
+    <ds:schemaRef ds:uri="http://schemas.microsoft.com/office/2006/metadata/properties/metaAttributes"/>
+    <ds:schemaRef ds:uri="http://www.w3.org/2001/XMLSchema"/>
+    <ds:schemaRef ds:uri="http://schemas.microsoft.com/office/2006/metadata/properties"/>
+    <ds:schemaRef ds:uri="http://schemas.microsoft.com/sharepoint/v3"/>
+    <ds:schemaRef ds:uri="debf2d1a-3119-443f-9311-2f3fb0fd7de8"/>
+    <ds:schemaRef ds:uri="9ece1660-89e4-4efe-8613-f619625afc8d"/>
+    <ds:schemaRef ds:uri="http://schemas.microsoft.com/office/2006/documentManagement/types"/>
+    <ds:schemaRef ds:uri="http://schemas.microsoft.com/office/infopath/2007/PartnerControls"/>
+    <ds:schemaRef ds:uri="http://schemas.openxmlformats.org/package/2006/metadata/core-properties"/>
     <ds:schemaRef ds:uri="http://purl.org/dc/elements/1.1/"/>
     <ds:schemaRef ds:uri="http://purl.org/dc/terms/"/>
-    <ds:schemaRef ds:uri="http://schemas.microsoft.com/office/2006/documentManagement/types"/>
-    <ds:schemaRef ds:uri="http://schemas.microsoft.com/office/2006/metadata/properties"/>
-    <ds:schemaRef ds:uri="http://schemas.microsoft.com/office/infopath/2007/PartnerControls"/>
-    <ds:schemaRef ds:uri="http://schemas.openxmlformats.org/package/2006/metadata/core-properties"/>
-    <ds:schemaRef ds:uri="http://www.w3.org/XML/1998/namespace"/>
+    <ds:schemaRef ds:uri="http://schemas.microsoft.com/internal/obd"/>
   </ds:schemaRefs>
 </ds:datastoreItem>
 </file>
@@ -27361,12 +27365,27 @@
 </file>
 
 <file path=customXml/itemProps3.xml><?xml version="1.0" encoding="utf-8"?>
-<ds:datastoreItem xmlns:ds="http://schemas.openxmlformats.org/officeDocument/2006/customXml" ds:itemID="{F5F26032-4E8C-41C9-81EF-C4526616B487}"/>
+<ds:datastoreItem xmlns:ds="http://schemas.openxmlformats.org/officeDocument/2006/customXml" ds:itemID="{A70E81DD-77AF-45EC-82F0-7316C24EE21B}">
+  <ds:schemaRefs>
+    <ds:schemaRef ds:uri="b666c4c0-4622-40b9-a367-d6c6c5520eb5"/>
+    <ds:schemaRef ds:uri="http://purl.org/dc/dcmitype/"/>
+    <ds:schemaRef ds:uri="http://purl.org/dc/elements/1.1/"/>
+    <ds:schemaRef ds:uri="http://purl.org/dc/terms/"/>
+    <ds:schemaRef ds:uri="http://schemas.microsoft.com/office/2006/documentManagement/types"/>
+    <ds:schemaRef ds:uri="http://schemas.microsoft.com/office/2006/metadata/properties"/>
+    <ds:schemaRef ds:uri="http://schemas.microsoft.com/office/infopath/2007/PartnerControls"/>
+    <ds:schemaRef ds:uri="http://schemas.openxmlformats.org/package/2006/metadata/core-properties"/>
+    <ds:schemaRef ds:uri="http://www.w3.org/XML/1998/namespace"/>
+    <ds:schemaRef ds:uri="http://schemas.microsoft.com/sharepoint/v3"/>
+    <ds:schemaRef ds:uri="9ece1660-89e4-4efe-8613-f619625afc8d"/>
+    <ds:schemaRef ds:uri="debf2d1a-3119-443f-9311-2f3fb0fd7de8"/>
+  </ds:schemaRefs>
+</ds:datastoreItem>
 </file>
 
 <file path=docMetadata/LabelInfo.xml><?xml version="1.0" encoding="utf-8"?>
 <clbl:labelList xmlns:clbl="http://schemas.microsoft.com/office/2020/mipLabelMetadata">
-  <clbl:label id="{defa4170-0d19-0005-0004-bc88714345d2}" enabled="1" method="Standard" siteId="{b3405559-59d9-471c-b95a-994a94f9a309}" contentBits="0" removed="0"/>
-  <clbl:label id="{f42aa342-8706-4288-bd11-ebb85995028c}" enabled="1" method="Privileged" siteId="{72f988bf-86f1-41af-91ab-2d7cd011db47}" removed="0"/>
+  <clbl:label id="{87867195-f2b8-4ac2-b0b6-6bb73cb33afc}" enabled="1" method="Privileged" siteId="{72f988bf-86f1-41af-91ab-2d7cd011db47}" removed="0"/>
+  <clbl:label id="{defa4170-0d19-0005-0004-bc88714345d2}" enabled="1" method="Standard" siteId="{b3405559-59d9-471c-b95a-994a94f9a309}" removed="0"/>
 </clbl:labelList>
 </file>